--- a/templates/PPT_template/Academic_Template.pptx
+++ b/templates/PPT_template/Academic_Template.pptx
@@ -3098,7 +3098,7 @@
     <p:bg>
       <p:bgPr>
         <a:solidFill>
-          <a:srgbClr val="1F4E79"/>
+          <a:srgbClr val="FFFFFF"/>
         </a:solidFill>
         <a:effectLst/>
       </p:bgPr>
@@ -3112,20 +3112,20 @@
       <p:grpSpPr/>
       <p:sp>
         <p:nvSpPr>
-          <p:cNvPr id="2" name="Oval 1"/>
+          <p:cNvPr id="2" name="Rectangle 1"/>
           <p:cNvSpPr/>
           <p:nvPr/>
         </p:nvSpPr>
         <p:spPr>
           <a:xfrm>
-            <a:off x="8595360" y="-1463040"/>
-            <a:ext cx="4572000" cy="4572000"/>
-          </a:xfrm>
-          <a:prstGeom prst="ellipse">
+            <a:off x="0" y="0"/>
+            <a:ext cx="1920240" cy="6858000"/>
+          </a:xfrm>
+          <a:prstGeom prst="rect">
             <a:avLst/>
           </a:prstGeom>
           <a:solidFill>
-            <a:srgbClr val="D6E4F0"/>
+            <a:srgbClr val="1F4E79"/>
           </a:solidFill>
           <a:ln>
             <a:noFill/>
@@ -3162,8 +3162,8 @@
         </p:nvSpPr>
         <p:spPr>
           <a:xfrm>
-            <a:off x="0" y="0"/>
-            <a:ext cx="146304" cy="6858000"/>
+            <a:off x="1920240" y="0"/>
+            <a:ext cx="54864" cy="6858000"/>
           </a:xfrm>
           <a:prstGeom prst="rect">
             <a:avLst/>
@@ -3206,8 +3206,8 @@
         </p:nvSpPr>
         <p:spPr>
           <a:xfrm>
-            <a:off x="868680" y="6263640"/>
-            <a:ext cx="5486400" cy="365760"/>
+            <a:off x="502920" y="6309360"/>
+            <a:ext cx="1371600" cy="365760"/>
           </a:xfrm>
           <a:prstGeom prst="rect">
             <a:avLst/>
@@ -3241,8 +3241,8 @@
         </p:nvSpPr>
         <p:spPr>
           <a:xfrm>
-            <a:off x="914400" y="1828800"/>
-            <a:ext cx="10332720" cy="1737360"/>
+            <a:off x="2468880" y="2148840"/>
+            <a:ext cx="8778240" cy="1554480"/>
           </a:xfrm>
           <a:prstGeom prst="rect">
             <a:avLst/>
@@ -3259,7 +3259,7 @@
             <a:r>
               <a:rPr sz="4000" b="1" i="0">
                 <a:solidFill>
-                  <a:srgbClr val="FFFFFF"/>
+                  <a:srgbClr val="1F4E79"/>
                 </a:solidFill>
                 <a:latin typeface="Microsoft YaHei"/>
               </a:rPr>
@@ -3276,25 +3276,25 @@
         </p:nvSpPr>
         <p:spPr>
           <a:xfrm>
-            <a:off x="914400" y="3749039"/>
-            <a:ext cx="10332720" cy="822960"/>
-          </a:xfrm>
-          <a:prstGeom prst="rect">
-            <a:avLst/>
-          </a:prstGeom>
-          <a:noFill/>
-        </p:spPr>
-        <p:txBody>
-          <a:bodyPr wrap="square" lIns="18288" rIns="18288" tIns="9144" bIns="9144" anchor="ctr">
-            <a:spAutoFit/>
-          </a:bodyPr>
-          <a:lstStyle/>
-          <a:p>
-            <a:pPr algn="l"/>
-            <a:r>
-              <a:rPr sz="2000" b="0" i="0">
-                <a:solidFill>
-                  <a:srgbClr val="FFFFFF"/>
+            <a:off x="2468880" y="3794760"/>
+            <a:ext cx="8778240" cy="640080"/>
+          </a:xfrm>
+          <a:prstGeom prst="rect">
+            <a:avLst/>
+          </a:prstGeom>
+          <a:noFill/>
+        </p:spPr>
+        <p:txBody>
+          <a:bodyPr wrap="square" lIns="18288" rIns="18288" tIns="9144" bIns="9144" anchor="ctr">
+            <a:spAutoFit/>
+          </a:bodyPr>
+          <a:lstStyle/>
+          <a:p>
+            <a:pPr algn="l"/>
+            <a:r>
+              <a:rPr sz="1800" b="0" i="0">
+                <a:solidFill>
+                  <a:srgbClr val="6B7280"/>
                 </a:solidFill>
                 <a:latin typeface="Microsoft YaHei"/>
               </a:rPr>
@@ -3338,7 +3338,7 @@
         <p:spPr>
           <a:xfrm>
             <a:off x="0" y="0"/>
-            <a:ext cx="118872" cy="6858000"/>
+            <a:ext cx="146304" cy="6858000"/>
           </a:xfrm>
           <a:prstGeom prst="rect">
             <a:avLst/>
@@ -3451,8 +3451,8 @@
         </p:nvSpPr>
         <p:spPr>
           <a:xfrm>
-            <a:off x="548640" y="457200"/>
-            <a:ext cx="11064240" cy="777240"/>
+            <a:off x="594360" y="457200"/>
+            <a:ext cx="10789920" cy="777240"/>
           </a:xfrm>
           <a:prstGeom prst="rect">
             <a:avLst/>
@@ -3486,7 +3486,7 @@
         </p:nvSpPr>
         <p:spPr>
           <a:xfrm>
-            <a:off x="566928" y="1298448"/>
+            <a:off x="621792" y="1298448"/>
             <a:ext cx="1234440" cy="82296"/>
           </a:xfrm>
           <a:prstGeom prst="rect">
@@ -3531,7 +3531,7 @@
         <p:spPr>
           <a:xfrm>
             <a:off x="594360" y="1691640"/>
-            <a:ext cx="2606040" cy="1051560"/>
+            <a:ext cx="2606040" cy="1005840"/>
           </a:xfrm>
           <a:prstGeom prst="rect">
             <a:avLst/>
@@ -3565,8 +3565,8 @@
         </p:nvSpPr>
         <p:spPr>
           <a:xfrm>
-            <a:off x="3429000" y="1691640"/>
-            <a:ext cx="2606040" cy="1051560"/>
+            <a:off x="6035040" y="1691640"/>
+            <a:ext cx="2606040" cy="1005840"/>
           </a:xfrm>
           <a:prstGeom prst="rect">
             <a:avLst/>
@@ -3600,8 +3600,8 @@
         </p:nvSpPr>
         <p:spPr>
           <a:xfrm>
-            <a:off x="6263640" y="1691640"/>
-            <a:ext cx="2606040" cy="1051560"/>
+            <a:off x="11475720" y="1691640"/>
+            <a:ext cx="2606040" cy="1005840"/>
           </a:xfrm>
           <a:prstGeom prst="rect">
             <a:avLst/>
@@ -3635,8 +3635,8 @@
         </p:nvSpPr>
         <p:spPr>
           <a:xfrm>
-            <a:off x="9098280" y="1691640"/>
-            <a:ext cx="2606040" cy="1051560"/>
+            <a:off x="16916400" y="1691640"/>
+            <a:ext cx="2606040" cy="1005840"/>
           </a:xfrm>
           <a:prstGeom prst="rect">
             <a:avLst/>
@@ -3670,7 +3670,7 @@
         </p:nvSpPr>
         <p:spPr>
           <a:xfrm>
-            <a:off x="594360" y="3108960"/>
+            <a:off x="594360" y="3063240"/>
             <a:ext cx="2743200" cy="457200"/>
           </a:xfrm>
           <a:prstGeom prst="rect">
@@ -3705,7 +3705,7 @@
         </p:nvSpPr>
         <p:spPr>
           <a:xfrm>
-            <a:off x="594360" y="3657600"/>
+            <a:off x="594360" y="3611880"/>
             <a:ext cx="10972800" cy="1097280"/>
           </a:xfrm>
           <a:prstGeom prst="rect">
@@ -3767,7 +3767,7 @@
         <p:spPr>
           <a:xfrm>
             <a:off x="0" y="0"/>
-            <a:ext cx="118872" cy="6858000"/>
+            <a:ext cx="146304" cy="6858000"/>
           </a:xfrm>
           <a:prstGeom prst="rect">
             <a:avLst/>
@@ -3880,8 +3880,8 @@
         </p:nvSpPr>
         <p:spPr>
           <a:xfrm>
-            <a:off x="548640" y="457200"/>
-            <a:ext cx="11064240" cy="777240"/>
+            <a:off x="594360" y="457200"/>
+            <a:ext cx="10789920" cy="777240"/>
           </a:xfrm>
           <a:prstGeom prst="rect">
             <a:avLst/>
@@ -3915,7 +3915,7 @@
         </p:nvSpPr>
         <p:spPr>
           <a:xfrm>
-            <a:off x="566928" y="1298448"/>
+            <a:off x="621792" y="1298448"/>
             <a:ext cx="1234440" cy="82296"/>
           </a:xfrm>
           <a:prstGeom prst="rect">
@@ -3960,7 +3960,7 @@
         <p:spPr>
           <a:xfrm>
             <a:off x="594360" y="1783080"/>
-            <a:ext cx="10972800" cy="822960"/>
+            <a:ext cx="10972800" cy="777240"/>
           </a:xfrm>
           <a:prstGeom prst="rect">
             <a:avLst/>
@@ -3994,8 +3994,8 @@
         </p:nvSpPr>
         <p:spPr>
           <a:xfrm>
-            <a:off x="594360" y="2880360"/>
-            <a:ext cx="10972800" cy="777240"/>
+            <a:off x="594360" y="2834640"/>
+            <a:ext cx="10972800" cy="731520"/>
           </a:xfrm>
           <a:prstGeom prst="rect">
             <a:avLst/>
@@ -4029,8 +4029,8 @@
         </p:nvSpPr>
         <p:spPr>
           <a:xfrm>
-            <a:off x="594360" y="3840480"/>
-            <a:ext cx="10972800" cy="777240"/>
+            <a:off x="594360" y="4480560"/>
+            <a:ext cx="10972800" cy="731520"/>
           </a:xfrm>
           <a:prstGeom prst="rect">
             <a:avLst/>
@@ -4064,8 +4064,8 @@
         </p:nvSpPr>
         <p:spPr>
           <a:xfrm>
-            <a:off x="594360" y="4800600"/>
-            <a:ext cx="10972800" cy="777240"/>
+            <a:off x="594360" y="6126480"/>
+            <a:ext cx="10972800" cy="731520"/>
           </a:xfrm>
           <a:prstGeom prst="rect">
             <a:avLst/>
@@ -4126,7 +4126,7 @@
         <p:spPr>
           <a:xfrm>
             <a:off x="0" y="0"/>
-            <a:ext cx="118872" cy="6858000"/>
+            <a:ext cx="146304" cy="6858000"/>
           </a:xfrm>
           <a:prstGeom prst="rect">
             <a:avLst/>
@@ -4239,8 +4239,8 @@
         </p:nvSpPr>
         <p:spPr>
           <a:xfrm>
-            <a:off x="548640" y="457200"/>
-            <a:ext cx="11064240" cy="777240"/>
+            <a:off x="594360" y="457200"/>
+            <a:ext cx="10789920" cy="777240"/>
           </a:xfrm>
           <a:prstGeom prst="rect">
             <a:avLst/>
@@ -4274,7 +4274,7 @@
         </p:nvSpPr>
         <p:spPr>
           <a:xfrm>
-            <a:off x="566928" y="1298448"/>
+            <a:off x="621792" y="1298448"/>
             <a:ext cx="1234440" cy="82296"/>
           </a:xfrm>
           <a:prstGeom prst="rect">
@@ -4423,7 +4423,7 @@
         </p:nvSpPr>
         <p:spPr>
           <a:xfrm>
-            <a:off x="594360" y="3017520"/>
+            <a:off x="594360" y="3566160"/>
             <a:ext cx="5394960" cy="548640"/>
           </a:xfrm>
           <a:prstGeom prst="rect">
@@ -4458,7 +4458,7 @@
         </p:nvSpPr>
         <p:spPr>
           <a:xfrm>
-            <a:off x="6263640" y="3017520"/>
+            <a:off x="6263640" y="3566160"/>
             <a:ext cx="5394960" cy="548640"/>
           </a:xfrm>
           <a:prstGeom prst="rect">
@@ -4493,7 +4493,7 @@
         </p:nvSpPr>
         <p:spPr>
           <a:xfrm>
-            <a:off x="594360" y="3703320"/>
+            <a:off x="594360" y="4800600"/>
             <a:ext cx="5394960" cy="548640"/>
           </a:xfrm>
           <a:prstGeom prst="rect">
@@ -4528,7 +4528,7 @@
         </p:nvSpPr>
         <p:spPr>
           <a:xfrm>
-            <a:off x="6263640" y="3703320"/>
+            <a:off x="6263640" y="4800600"/>
             <a:ext cx="5394960" cy="548640"/>
           </a:xfrm>
           <a:prstGeom prst="rect">
@@ -4563,7 +4563,7 @@
         </p:nvSpPr>
         <p:spPr>
           <a:xfrm>
-            <a:off x="594360" y="4389120"/>
+            <a:off x="594360" y="6035040"/>
             <a:ext cx="5394960" cy="548640"/>
           </a:xfrm>
           <a:prstGeom prst="rect">
@@ -4598,7 +4598,7 @@
         </p:nvSpPr>
         <p:spPr>
           <a:xfrm>
-            <a:off x="6263640" y="4389120"/>
+            <a:off x="6263640" y="6035040"/>
             <a:ext cx="5394960" cy="548640"/>
           </a:xfrm>
           <a:prstGeom prst="rect">
@@ -4634,7 +4634,7 @@
         <p:spPr>
           <a:xfrm>
             <a:off x="594360" y="5349240"/>
-            <a:ext cx="10972800" cy="685800"/>
+            <a:ext cx="10972800" cy="640080"/>
           </a:xfrm>
           <a:prstGeom prst="rect">
             <a:avLst/>
@@ -4695,7 +4695,7 @@
         <p:spPr>
           <a:xfrm>
             <a:off x="0" y="0"/>
-            <a:ext cx="118872" cy="6858000"/>
+            <a:ext cx="146304" cy="6858000"/>
           </a:xfrm>
           <a:prstGeom prst="rect">
             <a:avLst/>
@@ -4808,8 +4808,8 @@
         </p:nvSpPr>
         <p:spPr>
           <a:xfrm>
-            <a:off x="548640" y="457200"/>
-            <a:ext cx="11064240" cy="777240"/>
+            <a:off x="594360" y="457200"/>
+            <a:ext cx="10789920" cy="777240"/>
           </a:xfrm>
           <a:prstGeom prst="rect">
             <a:avLst/>
@@ -4843,7 +4843,7 @@
         </p:nvSpPr>
         <p:spPr>
           <a:xfrm>
-            <a:off x="566928" y="1298448"/>
+            <a:off x="621792" y="1298448"/>
             <a:ext cx="1234440" cy="82296"/>
           </a:xfrm>
           <a:prstGeom prst="rect">
@@ -5159,7 +5159,7 @@
         <p:spPr>
           <a:xfrm>
             <a:off x="0" y="0"/>
-            <a:ext cx="118872" cy="6858000"/>
+            <a:ext cx="146304" cy="6858000"/>
           </a:xfrm>
           <a:prstGeom prst="rect">
             <a:avLst/>
@@ -5272,8 +5272,8 @@
         </p:nvSpPr>
         <p:spPr>
           <a:xfrm>
-            <a:off x="548640" y="457200"/>
-            <a:ext cx="11064240" cy="777240"/>
+            <a:off x="594360" y="457200"/>
+            <a:ext cx="10789920" cy="777240"/>
           </a:xfrm>
           <a:prstGeom prst="rect">
             <a:avLst/>
@@ -5307,7 +5307,7 @@
         </p:nvSpPr>
         <p:spPr>
           <a:xfrm>
-            <a:off x="566928" y="1298448"/>
+            <a:off x="621792" y="1298448"/>
             <a:ext cx="1234440" cy="82296"/>
           </a:xfrm>
           <a:prstGeom prst="rect">
@@ -5422,7 +5422,7 @@
         <p:spPr>
           <a:xfrm>
             <a:off x="914400" y="3611880"/>
-            <a:ext cx="5029200" cy="685800"/>
+            <a:ext cx="5029200" cy="658368"/>
           </a:xfrm>
           <a:prstGeom prst="rect">
             <a:avLst/>
@@ -5457,7 +5457,7 @@
         <p:spPr>
           <a:xfrm>
             <a:off x="6217920" y="3611880"/>
-            <a:ext cx="5029200" cy="685800"/>
+            <a:ext cx="5029200" cy="658368"/>
           </a:xfrm>
           <a:prstGeom prst="rect">
             <a:avLst/>
@@ -5491,8 +5491,8 @@
         </p:nvSpPr>
         <p:spPr>
           <a:xfrm>
-            <a:off x="914400" y="4434840"/>
-            <a:ext cx="5029200" cy="685800"/>
+            <a:off x="914400" y="5093208"/>
+            <a:ext cx="5029200" cy="658368"/>
           </a:xfrm>
           <a:prstGeom prst="rect">
             <a:avLst/>
@@ -5526,8 +5526,8 @@
         </p:nvSpPr>
         <p:spPr>
           <a:xfrm>
-            <a:off x="6217920" y="4434840"/>
-            <a:ext cx="5029200" cy="685800"/>
+            <a:off x="6217920" y="5093208"/>
+            <a:ext cx="5029200" cy="658368"/>
           </a:xfrm>
           <a:prstGeom prst="rect">
             <a:avLst/>
@@ -5587,8 +5587,8 @@
         </p:nvSpPr>
         <p:spPr>
           <a:xfrm>
-            <a:off x="-1463040" y="4389120"/>
-            <a:ext cx="4572000" cy="4572000"/>
+            <a:off x="-1371600" y="4114800"/>
+            <a:ext cx="4389120" cy="4389120"/>
           </a:xfrm>
           <a:prstGeom prst="ellipse">
             <a:avLst/>
@@ -5631,8 +5631,8 @@
         </p:nvSpPr>
         <p:spPr>
           <a:xfrm>
-            <a:off x="868680" y="6263640"/>
-            <a:ext cx="5486400" cy="365760"/>
+            <a:off x="868680" y="6309360"/>
+            <a:ext cx="3657600" cy="365760"/>
           </a:xfrm>
           <a:prstGeom prst="rect">
             <a:avLst/>
@@ -5666,8 +5666,8 @@
         </p:nvSpPr>
         <p:spPr>
           <a:xfrm>
-            <a:off x="914400" y="2011680"/>
-            <a:ext cx="10332720" cy="1188720"/>
+            <a:off x="1097280" y="2194560"/>
+            <a:ext cx="10058400" cy="1188720"/>
           </a:xfrm>
           <a:prstGeom prst="rect">
             <a:avLst/>
@@ -5701,8 +5701,8 @@
         </p:nvSpPr>
         <p:spPr>
           <a:xfrm>
-            <a:off x="914400" y="3474720"/>
-            <a:ext cx="10332720" cy="822960"/>
+            <a:off x="1097280" y="3611880"/>
+            <a:ext cx="10058400" cy="731520"/>
           </a:xfrm>
           <a:prstGeom prst="rect">
             <a:avLst/>
@@ -5763,7 +5763,7 @@
         <p:spPr>
           <a:xfrm>
             <a:off x="0" y="0"/>
-            <a:ext cx="118872" cy="6858000"/>
+            <a:ext cx="146304" cy="6858000"/>
           </a:xfrm>
           <a:prstGeom prst="rect">
             <a:avLst/>
@@ -5876,8 +5876,8 @@
         </p:nvSpPr>
         <p:spPr>
           <a:xfrm>
-            <a:off x="548640" y="457200"/>
-            <a:ext cx="11064240" cy="777240"/>
+            <a:off x="594360" y="457200"/>
+            <a:ext cx="10789920" cy="777240"/>
           </a:xfrm>
           <a:prstGeom prst="rect">
             <a:avLst/>
@@ -5911,7 +5911,7 @@
         </p:nvSpPr>
         <p:spPr>
           <a:xfrm>
-            <a:off x="566928" y="1298448"/>
+            <a:off x="621792" y="1298448"/>
             <a:ext cx="1234440" cy="82296"/>
           </a:xfrm>
           <a:prstGeom prst="rect">
@@ -5955,8 +5955,8 @@
         </p:nvSpPr>
         <p:spPr>
           <a:xfrm>
-            <a:off x="594360" y="1645920"/>
-            <a:ext cx="10972800" cy="960120"/>
+            <a:off x="594360" y="1691640"/>
+            <a:ext cx="10972800" cy="914400"/>
           </a:xfrm>
           <a:prstGeom prst="rect">
             <a:avLst/>
@@ -5991,7 +5991,7 @@
         <p:spPr>
           <a:xfrm>
             <a:off x="594360" y="2788920"/>
-            <a:ext cx="10972800" cy="566928"/>
+            <a:ext cx="10972800" cy="530352"/>
           </a:xfrm>
           <a:prstGeom prst="rect">
             <a:avLst/>
@@ -6025,8 +6025,8 @@
         </p:nvSpPr>
         <p:spPr>
           <a:xfrm>
-            <a:off x="594360" y="3447288"/>
-            <a:ext cx="10972800" cy="566928"/>
+            <a:off x="594360" y="3941063"/>
+            <a:ext cx="10972800" cy="530352"/>
           </a:xfrm>
           <a:prstGeom prst="rect">
             <a:avLst/>
@@ -6060,8 +6060,8 @@
         </p:nvSpPr>
         <p:spPr>
           <a:xfrm>
-            <a:off x="594360" y="4105656"/>
-            <a:ext cx="10972800" cy="566928"/>
+            <a:off x="594360" y="5093208"/>
+            <a:ext cx="10972800" cy="530352"/>
           </a:xfrm>
           <a:prstGeom prst="rect">
             <a:avLst/>
@@ -6095,8 +6095,8 @@
         </p:nvSpPr>
         <p:spPr>
           <a:xfrm>
-            <a:off x="594360" y="4764024"/>
-            <a:ext cx="10972800" cy="566928"/>
+            <a:off x="594360" y="6245352"/>
+            <a:ext cx="10972800" cy="530352"/>
           </a:xfrm>
           <a:prstGeom prst="rect">
             <a:avLst/>
@@ -6130,8 +6130,8 @@
         </p:nvSpPr>
         <p:spPr>
           <a:xfrm>
-            <a:off x="594360" y="5422392"/>
-            <a:ext cx="10972800" cy="566928"/>
+            <a:off x="594360" y="7397496"/>
+            <a:ext cx="10972800" cy="530352"/>
           </a:xfrm>
           <a:prstGeom prst="rect">
             <a:avLst/>
@@ -6192,7 +6192,7 @@
         <p:spPr>
           <a:xfrm>
             <a:off x="0" y="0"/>
-            <a:ext cx="118872" cy="6858000"/>
+            <a:ext cx="146304" cy="6858000"/>
           </a:xfrm>
           <a:prstGeom prst="rect">
             <a:avLst/>
@@ -6305,8 +6305,8 @@
         </p:nvSpPr>
         <p:spPr>
           <a:xfrm>
-            <a:off x="548640" y="457200"/>
-            <a:ext cx="11064240" cy="777240"/>
+            <a:off x="594360" y="457200"/>
+            <a:ext cx="10789920" cy="777240"/>
           </a:xfrm>
           <a:prstGeom prst="rect">
             <a:avLst/>
@@ -6340,7 +6340,7 @@
         </p:nvSpPr>
         <p:spPr>
           <a:xfrm>
-            <a:off x="566928" y="1298448"/>
+            <a:off x="621792" y="1298448"/>
             <a:ext cx="1234440" cy="82296"/>
           </a:xfrm>
           <a:prstGeom prst="rect">
@@ -6385,7 +6385,7 @@
         <p:spPr>
           <a:xfrm>
             <a:off x="594360" y="1737360"/>
-            <a:ext cx="10972800" cy="640080"/>
+            <a:ext cx="10972800" cy="594360"/>
           </a:xfrm>
           <a:prstGeom prst="rect">
             <a:avLst/>
@@ -6419,8 +6419,8 @@
         </p:nvSpPr>
         <p:spPr>
           <a:xfrm>
-            <a:off x="594360" y="2560320"/>
-            <a:ext cx="10972800" cy="731520"/>
+            <a:off x="594360" y="2468880"/>
+            <a:ext cx="10972800" cy="658368"/>
           </a:xfrm>
           <a:prstGeom prst="rect">
             <a:avLst/>
@@ -6454,8 +6454,8 @@
         </p:nvSpPr>
         <p:spPr>
           <a:xfrm>
-            <a:off x="594360" y="3429000"/>
-            <a:ext cx="10972800" cy="731520"/>
+            <a:off x="594360" y="3904487"/>
+            <a:ext cx="10972800" cy="658368"/>
           </a:xfrm>
           <a:prstGeom prst="rect">
             <a:avLst/>
@@ -6489,8 +6489,8 @@
         </p:nvSpPr>
         <p:spPr>
           <a:xfrm>
-            <a:off x="594360" y="4297680"/>
-            <a:ext cx="10972800" cy="731520"/>
+            <a:off x="594360" y="5340096"/>
+            <a:ext cx="10972800" cy="658368"/>
           </a:xfrm>
           <a:prstGeom prst="rect">
             <a:avLst/>
@@ -6524,8 +6524,8 @@
         </p:nvSpPr>
         <p:spPr>
           <a:xfrm>
-            <a:off x="594360" y="5166360"/>
-            <a:ext cx="10972800" cy="731520"/>
+            <a:off x="594360" y="6775703"/>
+            <a:ext cx="10972800" cy="658368"/>
           </a:xfrm>
           <a:prstGeom prst="rect">
             <a:avLst/>
@@ -6586,7 +6586,7 @@
         <p:spPr>
           <a:xfrm>
             <a:off x="0" y="0"/>
-            <a:ext cx="118872" cy="6858000"/>
+            <a:ext cx="146304" cy="6858000"/>
           </a:xfrm>
           <a:prstGeom prst="rect">
             <a:avLst/>
@@ -6699,8 +6699,8 @@
         </p:nvSpPr>
         <p:spPr>
           <a:xfrm>
-            <a:off x="548640" y="457200"/>
-            <a:ext cx="11064240" cy="777240"/>
+            <a:off x="594360" y="457200"/>
+            <a:ext cx="10789920" cy="777240"/>
           </a:xfrm>
           <a:prstGeom prst="rect">
             <a:avLst/>
@@ -6734,7 +6734,7 @@
         </p:nvSpPr>
         <p:spPr>
           <a:xfrm>
-            <a:off x="566928" y="1298448"/>
+            <a:off x="621792" y="1298448"/>
             <a:ext cx="1234440" cy="82296"/>
           </a:xfrm>
           <a:prstGeom prst="rect">
@@ -6779,7 +6779,7 @@
         <p:spPr>
           <a:xfrm>
             <a:off x="594360" y="1737360"/>
-            <a:ext cx="10972800" cy="640080"/>
+            <a:ext cx="10972800" cy="594360"/>
           </a:xfrm>
           <a:prstGeom prst="rect">
             <a:avLst/>
@@ -6813,8 +6813,8 @@
         </p:nvSpPr>
         <p:spPr>
           <a:xfrm>
-            <a:off x="594360" y="2606040"/>
-            <a:ext cx="5394960" cy="685800"/>
+            <a:off x="594360" y="2468880"/>
+            <a:ext cx="5394960" cy="658368"/>
           </a:xfrm>
           <a:prstGeom prst="rect">
             <a:avLst/>
@@ -6848,8 +6848,8 @@
         </p:nvSpPr>
         <p:spPr>
           <a:xfrm>
-            <a:off x="6263640" y="2606040"/>
-            <a:ext cx="5394960" cy="685800"/>
+            <a:off x="6263640" y="2468880"/>
+            <a:ext cx="5394960" cy="658368"/>
           </a:xfrm>
           <a:prstGeom prst="rect">
             <a:avLst/>
@@ -6883,8 +6883,8 @@
         </p:nvSpPr>
         <p:spPr>
           <a:xfrm>
-            <a:off x="594360" y="3474720"/>
-            <a:ext cx="5394960" cy="685800"/>
+            <a:off x="594360" y="3950208"/>
+            <a:ext cx="5394960" cy="658368"/>
           </a:xfrm>
           <a:prstGeom prst="rect">
             <a:avLst/>
@@ -6918,8 +6918,8 @@
         </p:nvSpPr>
         <p:spPr>
           <a:xfrm>
-            <a:off x="6263640" y="3474720"/>
-            <a:ext cx="5394960" cy="685800"/>
+            <a:off x="6263640" y="3950208"/>
+            <a:ext cx="5394960" cy="658368"/>
           </a:xfrm>
           <a:prstGeom prst="rect">
             <a:avLst/>
@@ -6980,7 +6980,7 @@
         <p:spPr>
           <a:xfrm>
             <a:off x="0" y="0"/>
-            <a:ext cx="118872" cy="6858000"/>
+            <a:ext cx="146304" cy="6858000"/>
           </a:xfrm>
           <a:prstGeom prst="rect">
             <a:avLst/>
@@ -7093,8 +7093,8 @@
         </p:nvSpPr>
         <p:spPr>
           <a:xfrm>
-            <a:off x="548640" y="457200"/>
-            <a:ext cx="11064240" cy="777240"/>
+            <a:off x="594360" y="457200"/>
+            <a:ext cx="10789920" cy="777240"/>
           </a:xfrm>
           <a:prstGeom prst="rect">
             <a:avLst/>
@@ -7128,7 +7128,7 @@
         </p:nvSpPr>
         <p:spPr>
           <a:xfrm>
-            <a:off x="566928" y="1298448"/>
+            <a:off x="621792" y="1298448"/>
             <a:ext cx="1234440" cy="82296"/>
           </a:xfrm>
           <a:prstGeom prst="rect">
@@ -7172,8 +7172,8 @@
         </p:nvSpPr>
         <p:spPr>
           <a:xfrm>
-            <a:off x="594360" y="1645920"/>
-            <a:ext cx="10972800" cy="914400"/>
+            <a:off x="594360" y="1691640"/>
+            <a:ext cx="10972800" cy="868680"/>
           </a:xfrm>
           <a:prstGeom prst="rect">
             <a:avLst/>
@@ -7207,8 +7207,8 @@
         </p:nvSpPr>
         <p:spPr>
           <a:xfrm>
-            <a:off x="594360" y="2743200"/>
-            <a:ext cx="5394960" cy="594360"/>
+            <a:off x="594360" y="2697480"/>
+            <a:ext cx="5394960" cy="566928"/>
           </a:xfrm>
           <a:prstGeom prst="rect">
             <a:avLst/>
@@ -7242,8 +7242,8 @@
         </p:nvSpPr>
         <p:spPr>
           <a:xfrm>
-            <a:off x="6263640" y="2743200"/>
-            <a:ext cx="5394960" cy="594360"/>
+            <a:off x="6263640" y="2697480"/>
+            <a:ext cx="5394960" cy="566928"/>
           </a:xfrm>
           <a:prstGeom prst="rect">
             <a:avLst/>
@@ -7277,8 +7277,8 @@
         </p:nvSpPr>
         <p:spPr>
           <a:xfrm>
-            <a:off x="594360" y="3474720"/>
-            <a:ext cx="5394960" cy="594360"/>
+            <a:off x="594360" y="3950208"/>
+            <a:ext cx="5394960" cy="566928"/>
           </a:xfrm>
           <a:prstGeom prst="rect">
             <a:avLst/>
@@ -7312,8 +7312,8 @@
         </p:nvSpPr>
         <p:spPr>
           <a:xfrm>
-            <a:off x="6263640" y="3474720"/>
-            <a:ext cx="5394960" cy="594360"/>
+            <a:off x="6263640" y="3950208"/>
+            <a:ext cx="5394960" cy="566928"/>
           </a:xfrm>
           <a:prstGeom prst="rect">
             <a:avLst/>
@@ -7347,8 +7347,8 @@
         </p:nvSpPr>
         <p:spPr>
           <a:xfrm>
-            <a:off x="594360" y="4206240"/>
-            <a:ext cx="5394960" cy="594360"/>
+            <a:off x="594360" y="5202936"/>
+            <a:ext cx="5394960" cy="566928"/>
           </a:xfrm>
           <a:prstGeom prst="rect">
             <a:avLst/>
@@ -7382,8 +7382,8 @@
         </p:nvSpPr>
         <p:spPr>
           <a:xfrm>
-            <a:off x="6263640" y="4206240"/>
-            <a:ext cx="5394960" cy="594360"/>
+            <a:off x="6263640" y="5202936"/>
+            <a:ext cx="5394960" cy="566928"/>
           </a:xfrm>
           <a:prstGeom prst="rect">
             <a:avLst/>
@@ -7444,7 +7444,7 @@
         <p:spPr>
           <a:xfrm>
             <a:off x="0" y="0"/>
-            <a:ext cx="118872" cy="6858000"/>
+            <a:ext cx="146304" cy="6858000"/>
           </a:xfrm>
           <a:prstGeom prst="rect">
             <a:avLst/>
@@ -7557,8 +7557,8 @@
         </p:nvSpPr>
         <p:spPr>
           <a:xfrm>
-            <a:off x="548640" y="457200"/>
-            <a:ext cx="11064240" cy="777240"/>
+            <a:off x="594360" y="457200"/>
+            <a:ext cx="10789920" cy="777240"/>
           </a:xfrm>
           <a:prstGeom prst="rect">
             <a:avLst/>
@@ -7592,7 +7592,7 @@
         </p:nvSpPr>
         <p:spPr>
           <a:xfrm>
-            <a:off x="566928" y="1298448"/>
+            <a:off x="621792" y="1298448"/>
             <a:ext cx="1234440" cy="82296"/>
           </a:xfrm>
           <a:prstGeom prst="rect">
@@ -7636,8 +7636,8 @@
         </p:nvSpPr>
         <p:spPr>
           <a:xfrm>
-            <a:off x="594360" y="1645920"/>
-            <a:ext cx="3200400" cy="457200"/>
+            <a:off x="594360" y="1691640"/>
+            <a:ext cx="2926080" cy="457200"/>
           </a:xfrm>
           <a:prstGeom prst="rect">
             <a:avLst/>
@@ -7671,8 +7671,8 @@
         </p:nvSpPr>
         <p:spPr>
           <a:xfrm>
-            <a:off x="594360" y="2194560"/>
-            <a:ext cx="10972800" cy="731520"/>
+            <a:off x="594360" y="2240280"/>
+            <a:ext cx="10972800" cy="685800"/>
           </a:xfrm>
           <a:prstGeom prst="rect">
             <a:avLst/>
@@ -7706,8 +7706,8 @@
         </p:nvSpPr>
         <p:spPr>
           <a:xfrm>
-            <a:off x="594360" y="3108960"/>
-            <a:ext cx="10972800" cy="594360"/>
+            <a:off x="594360" y="3063240"/>
+            <a:ext cx="10972800" cy="566928"/>
           </a:xfrm>
           <a:prstGeom prst="rect">
             <a:avLst/>
@@ -7741,8 +7741,8 @@
         </p:nvSpPr>
         <p:spPr>
           <a:xfrm>
-            <a:off x="594360" y="3822191"/>
-            <a:ext cx="10972800" cy="594360"/>
+            <a:off x="594360" y="4315968"/>
+            <a:ext cx="10972800" cy="566928"/>
           </a:xfrm>
           <a:prstGeom prst="rect">
             <a:avLst/>
@@ -7776,8 +7776,8 @@
         </p:nvSpPr>
         <p:spPr>
           <a:xfrm>
-            <a:off x="594360" y="4535424"/>
-            <a:ext cx="10972800" cy="594360"/>
+            <a:off x="594360" y="5568696"/>
+            <a:ext cx="10972800" cy="566928"/>
           </a:xfrm>
           <a:prstGeom prst="rect">
             <a:avLst/>
@@ -7811,8 +7811,8 @@
         </p:nvSpPr>
         <p:spPr>
           <a:xfrm>
-            <a:off x="594360" y="5248656"/>
-            <a:ext cx="10972800" cy="594360"/>
+            <a:off x="594360" y="6821424"/>
+            <a:ext cx="10972800" cy="566928"/>
           </a:xfrm>
           <a:prstGeom prst="rect">
             <a:avLst/>
@@ -7873,7 +7873,7 @@
         <p:spPr>
           <a:xfrm>
             <a:off x="0" y="0"/>
-            <a:ext cx="118872" cy="6858000"/>
+            <a:ext cx="146304" cy="6858000"/>
           </a:xfrm>
           <a:prstGeom prst="rect">
             <a:avLst/>
@@ -7986,8 +7986,8 @@
         </p:nvSpPr>
         <p:spPr>
           <a:xfrm>
-            <a:off x="548640" y="457200"/>
-            <a:ext cx="11064240" cy="777240"/>
+            <a:off x="594360" y="457200"/>
+            <a:ext cx="10789920" cy="777240"/>
           </a:xfrm>
           <a:prstGeom prst="rect">
             <a:avLst/>
@@ -8021,7 +8021,7 @@
         </p:nvSpPr>
         <p:spPr>
           <a:xfrm>
-            <a:off x="566928" y="1298448"/>
+            <a:off x="621792" y="1298448"/>
             <a:ext cx="1234440" cy="82296"/>
           </a:xfrm>
           <a:prstGeom prst="rect">
@@ -8065,8 +8065,8 @@
         </p:nvSpPr>
         <p:spPr>
           <a:xfrm>
-            <a:off x="594360" y="1645920"/>
-            <a:ext cx="3200400" cy="457200"/>
+            <a:off x="594360" y="1691640"/>
+            <a:ext cx="2926080" cy="457200"/>
           </a:xfrm>
           <a:prstGeom prst="rect">
             <a:avLst/>
@@ -8100,8 +8100,8 @@
         </p:nvSpPr>
         <p:spPr>
           <a:xfrm>
-            <a:off x="594360" y="2194560"/>
-            <a:ext cx="10972800" cy="731520"/>
+            <a:off x="594360" y="2240280"/>
+            <a:ext cx="10972800" cy="685800"/>
           </a:xfrm>
           <a:prstGeom prst="rect">
             <a:avLst/>
@@ -8135,8 +8135,8 @@
         </p:nvSpPr>
         <p:spPr>
           <a:xfrm>
-            <a:off x="594360" y="3108960"/>
-            <a:ext cx="10972800" cy="594360"/>
+            <a:off x="594360" y="3063240"/>
+            <a:ext cx="10972800" cy="566928"/>
           </a:xfrm>
           <a:prstGeom prst="rect">
             <a:avLst/>
@@ -8170,8 +8170,8 @@
         </p:nvSpPr>
         <p:spPr>
           <a:xfrm>
-            <a:off x="594360" y="3822191"/>
-            <a:ext cx="10972800" cy="594360"/>
+            <a:off x="594360" y="4315968"/>
+            <a:ext cx="10972800" cy="566928"/>
           </a:xfrm>
           <a:prstGeom prst="rect">
             <a:avLst/>
@@ -8205,8 +8205,8 @@
         </p:nvSpPr>
         <p:spPr>
           <a:xfrm>
-            <a:off x="594360" y="4535424"/>
-            <a:ext cx="10972800" cy="594360"/>
+            <a:off x="594360" y="5568696"/>
+            <a:ext cx="10972800" cy="566928"/>
           </a:xfrm>
           <a:prstGeom prst="rect">
             <a:avLst/>
@@ -8240,8 +8240,8 @@
         </p:nvSpPr>
         <p:spPr>
           <a:xfrm>
-            <a:off x="594360" y="5248656"/>
-            <a:ext cx="10972800" cy="594360"/>
+            <a:off x="594360" y="6821424"/>
+            <a:ext cx="10972800" cy="566928"/>
           </a:xfrm>
           <a:prstGeom prst="rect">
             <a:avLst/>
@@ -8302,7 +8302,7 @@
         <p:spPr>
           <a:xfrm>
             <a:off x="0" y="0"/>
-            <a:ext cx="118872" cy="6858000"/>
+            <a:ext cx="146304" cy="6858000"/>
           </a:xfrm>
           <a:prstGeom prst="rect">
             <a:avLst/>
@@ -8415,8 +8415,8 @@
         </p:nvSpPr>
         <p:spPr>
           <a:xfrm>
-            <a:off x="548640" y="457200"/>
-            <a:ext cx="11064240" cy="777240"/>
+            <a:off x="594360" y="457200"/>
+            <a:ext cx="10789920" cy="777240"/>
           </a:xfrm>
           <a:prstGeom prst="rect">
             <a:avLst/>
@@ -8450,7 +8450,7 @@
         </p:nvSpPr>
         <p:spPr>
           <a:xfrm>
-            <a:off x="566928" y="1298448"/>
+            <a:off x="621792" y="1298448"/>
             <a:ext cx="1234440" cy="82296"/>
           </a:xfrm>
           <a:prstGeom prst="rect">
@@ -8494,8 +8494,8 @@
         </p:nvSpPr>
         <p:spPr>
           <a:xfrm>
-            <a:off x="594360" y="1645920"/>
-            <a:ext cx="3200400" cy="457200"/>
+            <a:off x="594360" y="1691640"/>
+            <a:ext cx="2926080" cy="457200"/>
           </a:xfrm>
           <a:prstGeom prst="rect">
             <a:avLst/>
@@ -8529,8 +8529,8 @@
         </p:nvSpPr>
         <p:spPr>
           <a:xfrm>
-            <a:off x="594360" y="2194560"/>
-            <a:ext cx="10972800" cy="731520"/>
+            <a:off x="594360" y="2240280"/>
+            <a:ext cx="10972800" cy="685800"/>
           </a:xfrm>
           <a:prstGeom prst="rect">
             <a:avLst/>
@@ -8564,8 +8564,8 @@
         </p:nvSpPr>
         <p:spPr>
           <a:xfrm>
-            <a:off x="594360" y="3108960"/>
-            <a:ext cx="10972800" cy="594360"/>
+            <a:off x="594360" y="3063240"/>
+            <a:ext cx="10972800" cy="566928"/>
           </a:xfrm>
           <a:prstGeom prst="rect">
             <a:avLst/>
@@ -8599,8 +8599,8 @@
         </p:nvSpPr>
         <p:spPr>
           <a:xfrm>
-            <a:off x="594360" y="3822191"/>
-            <a:ext cx="10972800" cy="594360"/>
+            <a:off x="594360" y="4315968"/>
+            <a:ext cx="10972800" cy="566928"/>
           </a:xfrm>
           <a:prstGeom prst="rect">
             <a:avLst/>
@@ -8634,8 +8634,8 @@
         </p:nvSpPr>
         <p:spPr>
           <a:xfrm>
-            <a:off x="594360" y="4535424"/>
-            <a:ext cx="10972800" cy="594360"/>
+            <a:off x="594360" y="5568696"/>
+            <a:ext cx="10972800" cy="566928"/>
           </a:xfrm>
           <a:prstGeom prst="rect">
             <a:avLst/>
@@ -8669,8 +8669,8 @@
         </p:nvSpPr>
         <p:spPr>
           <a:xfrm>
-            <a:off x="594360" y="5248656"/>
-            <a:ext cx="10972800" cy="594360"/>
+            <a:off x="594360" y="6821424"/>
+            <a:ext cx="10972800" cy="566928"/>
           </a:xfrm>
           <a:prstGeom prst="rect">
             <a:avLst/>
@@ -8731,7 +8731,7 @@
         <p:spPr>
           <a:xfrm>
             <a:off x="0" y="0"/>
-            <a:ext cx="118872" cy="6858000"/>
+            <a:ext cx="146304" cy="6858000"/>
           </a:xfrm>
           <a:prstGeom prst="rect">
             <a:avLst/>
@@ -8844,8 +8844,8 @@
         </p:nvSpPr>
         <p:spPr>
           <a:xfrm>
-            <a:off x="548640" y="457200"/>
-            <a:ext cx="11064240" cy="777240"/>
+            <a:off x="594360" y="457200"/>
+            <a:ext cx="10789920" cy="777240"/>
           </a:xfrm>
           <a:prstGeom prst="rect">
             <a:avLst/>
@@ -8879,7 +8879,7 @@
         </p:nvSpPr>
         <p:spPr>
           <a:xfrm>
-            <a:off x="566928" y="1298448"/>
+            <a:off x="621792" y="1298448"/>
             <a:ext cx="1234440" cy="82296"/>
           </a:xfrm>
           <a:prstGeom prst="rect">
@@ -8923,8 +8923,8 @@
         </p:nvSpPr>
         <p:spPr>
           <a:xfrm>
-            <a:off x="594360" y="1645920"/>
-            <a:ext cx="3200400" cy="457200"/>
+            <a:off x="594360" y="1691640"/>
+            <a:ext cx="2926080" cy="457200"/>
           </a:xfrm>
           <a:prstGeom prst="rect">
             <a:avLst/>
@@ -8958,8 +8958,8 @@
         </p:nvSpPr>
         <p:spPr>
           <a:xfrm>
-            <a:off x="594360" y="2194560"/>
-            <a:ext cx="10972800" cy="731520"/>
+            <a:off x="594360" y="2240280"/>
+            <a:ext cx="10972800" cy="685800"/>
           </a:xfrm>
           <a:prstGeom prst="rect">
             <a:avLst/>
@@ -8993,8 +8993,8 @@
         </p:nvSpPr>
         <p:spPr>
           <a:xfrm>
-            <a:off x="594360" y="3108960"/>
-            <a:ext cx="10972800" cy="594360"/>
+            <a:off x="594360" y="3063240"/>
+            <a:ext cx="10972800" cy="566928"/>
           </a:xfrm>
           <a:prstGeom prst="rect">
             <a:avLst/>
@@ -9028,8 +9028,8 @@
         </p:nvSpPr>
         <p:spPr>
           <a:xfrm>
-            <a:off x="594360" y="3822191"/>
-            <a:ext cx="10972800" cy="594360"/>
+            <a:off x="594360" y="4315968"/>
+            <a:ext cx="10972800" cy="566928"/>
           </a:xfrm>
           <a:prstGeom prst="rect">
             <a:avLst/>
@@ -9063,8 +9063,8 @@
         </p:nvSpPr>
         <p:spPr>
           <a:xfrm>
-            <a:off x="594360" y="4535424"/>
-            <a:ext cx="10972800" cy="594360"/>
+            <a:off x="594360" y="5568696"/>
+            <a:ext cx="10972800" cy="566928"/>
           </a:xfrm>
           <a:prstGeom prst="rect">
             <a:avLst/>
@@ -9098,8 +9098,8 @@
         </p:nvSpPr>
         <p:spPr>
           <a:xfrm>
-            <a:off x="594360" y="5248656"/>
-            <a:ext cx="10972800" cy="594360"/>
+            <a:off x="594360" y="6821424"/>
+            <a:ext cx="10972800" cy="566928"/>
           </a:xfrm>
           <a:prstGeom prst="rect">
             <a:avLst/>
